--- a/slides/deck.pptx
+++ b/slides/deck.pptx
@@ -3098,8 +3098,8 @@
         </p:nvSpPr>
         <p:spPr>
           <a:xfrm>
-            <a:off x="365760" y="182880"/>
-            <a:ext cx="11430000" cy="731520"/>
+            <a:off x="365760" y="137160"/>
+            <a:ext cx="11430000" cy="640080"/>
           </a:xfrm>
           <a:prstGeom prst="rect">
             <a:avLst/>
@@ -3113,7 +3113,7 @@
           <a:lstStyle/>
           <a:p>
             <a:pPr>
-              <a:defRPr sz="3200" b="1"/>
+              <a:defRPr sz="2800" b="1"/>
             </a:pPr>
             <a:r>
               <a:t>The data-generating process</a:t>
@@ -3129,8 +3129,8 @@
         </p:nvSpPr>
         <p:spPr>
           <a:xfrm>
-            <a:off x="365760" y="1005840"/>
-            <a:ext cx="5303520" cy="5486400"/>
+            <a:off x="365760" y="868680"/>
+            <a:ext cx="5852160" cy="5577840"/>
           </a:xfrm>
           <a:prstGeom prst="rect">
             <a:avLst/>
@@ -3144,41 +3144,65 @@
           <a:lstStyle/>
           <a:p>
             <a:pPr>
-              <a:defRPr sz="1500"/>
+              <a:defRPr sz="1100"/>
             </a:pPr>
             <a:r>
-              <a:t>- P_t,Y = N(m_t, sigma^2), m_t = -0.5 + 0.25t; sigma=1</a:t>
+              <a:t>- P_t on (Y x {0,1}); pi_t(y) := P[R=1|Y=y] = c_t * Phi(beta*y); P_t,Y = N(m_t, sigma^2)</a:t>
             </a:r>
           </a:p>
           <a:p>
             <a:pPr>
-              <a:defRPr sz="1500"/>
+              <a:defRPr sz="1100"/>
             </a:pPr>
             <a:r>
-              <a:t>- Survey selection: pi_t(y) = c_t * Phi(beta*y), c_t = 0.9 - 0.06t, beta=1.5</a:t>
+              <a:t>- S_t = Law(Y|R=1), density s_t = pi_t*p_t / rho_bar_t</a:t>
             </a:r>
           </a:p>
           <a:p>
             <a:pPr>
-              <a:defRPr sz="1500"/>
+              <a:defRPr sz="1100"/>
             </a:pPr>
             <a:r>
-              <a:t>- S_t = Y | R=1; m=6 (P_t years), M=9 (S_t years), n=2000 per (t,z) cell</a:t>
+              <a:t>- m=6, M=9, n=2000, sigma=1.0, beta=0.6, m_t=-0.5+0.25t, c_t=0.9-0.06t</a:t>
             </a:r>
           </a:p>
           <a:p>
             <a:pPr>
-              <a:defRPr sz="1500"/>
+              <a:defRPr sz="1100"/>
             </a:pPr>
             <a:r>
-              <a:t>- Survey bias E_St[Y] minus mu(t) shrinks from about 0.78 (t=1) to about 0.12 (t=9) by design</a:t>
+              <a:t>- Assumption 1 holds exactly: Phi(beta*y)/Phi(beta*y') has no t. rho_bar_t = c_t*Phi(a_t) varies with t but cancels out of S_t</a:t>
+            </a:r>
+          </a:p>
+          <a:p>
+            <a:pPr>
+              <a:defRPr sz="1100"/>
+            </a:pPr>
+            <a:r>
+              <a:t>- Sampler: Y~N(m_t,sigma^2), R~Bern(c_t*Phi(beta*Y)), keep Y with R=1 -- rejection sampling IS conditioning on R=1</a:t>
+            </a:r>
+          </a:p>
+          <a:p>
+            <a:pPr>
+              <a:defRPr sz="1100"/>
+            </a:pPr>
+            <a:r>
+              <a:t>- theta*(y) = log Phi(a_m) - log Phi(beta*y); alpha*(t) = log Phi(a_t) - log Phi(a_m)</a:t>
+            </a:r>
+          </a:p>
+          <a:p>
+            <a:pPr>
+              <a:defRPr sz="1100"/>
+            </a:pPr>
+            <a:r>
+              <a:t>- Design rule (R3): beta*sigma &lt; 1/sqrt(2) (=0.7071); tail index a = 1+1/(beta^2 sigma^2) = 3.78 (R3 holds: True)</a:t>
             </a:r>
           </a:p>
         </p:txBody>
       </p:sp>
       <p:pic>
         <p:nvPicPr>
-          <p:cNvPr id="4" name="Picture 3" descr="phase1a_densities_4b6ab92b.png"/>
+          <p:cNvPr id="4" name="Picture 3" descr="phase1a_densities_96169d0c.png"/>
           <p:cNvPicPr>
             <a:picLocks noChangeAspect="1"/>
           </p:cNvPicPr>
@@ -3192,14 +3216,45 @@
         </p:blipFill>
         <p:spPr>
           <a:xfrm>
-            <a:off x="5852160" y="1005840"/>
-            <a:ext cx="5943600" cy="2191814"/>
+            <a:off x="6400800" y="868680"/>
+            <a:ext cx="5486400" cy="2023213"/>
           </a:xfrm>
           <a:prstGeom prst="rect">
             <a:avLst/>
           </a:prstGeom>
         </p:spPr>
       </p:pic>
+      <p:sp>
+        <p:nvSpPr>
+          <p:cNvPr id="5" name="TextBox 4"/>
+          <p:cNvSpPr txBox="1"/>
+          <p:nvPr/>
+        </p:nvSpPr>
+        <p:spPr>
+          <a:xfrm>
+            <a:off x="6400800" y="2983333"/>
+            <a:ext cx="5486400" cy="548640"/>
+          </a:xfrm>
+          <a:prstGeom prst="rect">
+            <a:avLst/>
+          </a:prstGeom>
+          <a:noFill/>
+        </p:spPr>
+        <p:txBody>
+          <a:bodyPr wrap="square">
+            <a:spAutoFit/>
+          </a:bodyPr>
+          <a:lstStyle/>
+          <a:p>
+            <a:pPr>
+              <a:defRPr sz="1100" i="1"/>
+            </a:pPr>
+            <a:r>
+              <a:t>Survey bias E_St[Y]-mu(t) falls from +0.454 at t=1 to +0.168 at t=9 -- a constant-bias baseline must fail</a:t>
+            </a:r>
+          </a:p>
+        </p:txBody>
+      </p:sp>
     </p:spTree>
   </p:cSld>
   <p:clrMapOvr>
@@ -3226,8 +3281,8 @@
         </p:nvSpPr>
         <p:spPr>
           <a:xfrm>
-            <a:off x="365760" y="182880"/>
-            <a:ext cx="11430000" cy="731520"/>
+            <a:off x="365760" y="137160"/>
+            <a:ext cx="11430000" cy="640080"/>
           </a:xfrm>
           <a:prstGeom prst="rect">
             <a:avLst/>
@@ -3241,10 +3296,10 @@
           <a:lstStyle/>
           <a:p>
             <a:pPr>
-              <a:defRPr sz="3200" b="1"/>
+              <a:defRPr sz="2800" b="1"/>
             </a:pPr>
             <a:r>
-              <a:t>Optimization pipeline</a:t>
+              <a:t>Solving the optimization problem</a:t>
             </a:r>
           </a:p>
         </p:txBody>
@@ -3257,8 +3312,8 @@
         </p:nvSpPr>
         <p:spPr>
           <a:xfrm>
-            <a:off x="365760" y="1005840"/>
-            <a:ext cx="5303520" cy="5486400"/>
+            <a:off x="365760" y="868680"/>
+            <a:ext cx="5852160" cy="5577840"/>
           </a:xfrm>
           <a:prstGeom prst="rect">
             <a:avLst/>
@@ -3272,49 +3327,57 @@
           <a:lstStyle/>
           <a:p>
             <a:pPr>
-              <a:defRPr sz="1500"/>
+              <a:defRPr sz="1100"/>
             </a:pPr>
             <a:r>
-              <a:t>- Pooled convex loss: L = mean[(1-z)*exp(r) - z*r], r = theta(y) + alpha(t)</a:t>
+              <a:t>- Pooled F over rows (t,z,y), 2mn=24000 rows; L=mean((1-z)*exp(r)-z*r), r=theta(y)+alpha[t]</a:t>
             </a:r>
           </a:p>
           <a:p>
             <a:pPr>
-              <a:defRPr sz="1500"/>
+              <a:defRPr sz="1100"/>
             </a:pPr>
             <a:r>
-              <a:t>- theta = MLP(1-&gt;32-&gt;1, ReLU, bounded head B=20); alpha in R^6, alpha(6) anchored to 0</a:t>
+              <a:t>- Why this loss: its minimizer over separable r is log dP_t,Y/dS_t (the NWJ variational form of KL); alpha(t)=-log E_St[e^theta] is a per-year log-partition constant; the anchor alpha(m)=0 removes the flat direction (theta+c, alpha-c)</a:t>
             </a:r>
           </a:p>
           <a:p>
             <a:pPr>
-              <a:defRPr sz="1500"/>
+              <a:defRPr sz="1100"/>
             </a:pPr>
             <a:r>
-              <a:t>- Adam, lr=1e-3, wd=1e-5 (theta only), batch 256, 400 epochs, best-val-loss checkpoint</a:t>
+              <a:t>- Implementation: theta=MLP(1-&gt;H-&gt;1,ReLU,H=32); alpha=free vector in R^(m-1) concat with a constant 0; float64; Adam lr=0.001, wd=1e-05 (network only), batch=256; stratified 80/20 split; early stopping on validation risk</a:t>
             </a:r>
           </a:p>
           <a:p>
             <a:pPr>
-              <a:defRPr sz="1500"/>
+              <a:defRPr sz="1100"/>
             </a:pPr>
             <a:r>
-              <a:t>- CP3: first run (lr=3e-3, unbounded) was spiky and theta~ blew up in the tail; fixed by lowering lr and adding the bounded head</a:t>
+              <a:t>- Early stopping is REQUIRED, not cosmetic: R_hat_n is unbounded below for an interpolating theta. Measured: best val loss 0.4481 at epoch 140 of 400 run -- the best checkpoint is NOT the last epoch</a:t>
             </a:r>
           </a:p>
           <a:p>
             <a:pPr>
-              <a:defRPr sz="1500"/>
+              <a:defRPr sz="1100"/>
             </a:pPr>
             <a:r>
-              <a:t>- Every mu~ is gated on FOC~=1 (per year) and a theta~ vs theta* plot before being trusted</a:t>
+              <a:t>- Verification: 14 passed in 39.73s. T4 torch-vs-numpy: loss diff 5.6e-17, worst grad diff 6.9e-17; T7 parametric recovery a_hat=1.0063; T11 weight tails a=3.78, n_eff CV=0.048, SE ratio=0.99</a:t>
+            </a:r>
+          </a:p>
+          <a:p>
+            <a:pPr>
+              <a:defRPr sz="1100"/>
+            </a:pPr>
+            <a:r>
+              <a:t>- Diagnostics before any mu~ is reported: FOC mean_i e^(theta~+alpha~(t)) per year [t=1:1.037, t=2:1.012, t=3:1.003, t=4:0.998, t=5:0.988, t=6:0.969]; theta~ vs theta* grid; n_eff</a:t>
             </a:r>
           </a:p>
         </p:txBody>
       </p:sp>
       <p:pic>
         <p:nvPicPr>
-          <p:cNvPr id="4" name="Picture 3" descr="phase3_val_curve_8e4fef38.png"/>
+          <p:cNvPr id="4" name="Picture 3" descr="phase3_val_curve_96169d0c.png"/>
           <p:cNvPicPr>
             <a:picLocks noChangeAspect="1"/>
           </p:cNvPicPr>
@@ -3328,8 +3391,8 @@
         </p:blipFill>
         <p:spPr>
           <a:xfrm>
-            <a:off x="5852160" y="1005840"/>
-            <a:ext cx="5943600" cy="4466794"/>
+            <a:off x="6400800" y="868680"/>
+            <a:ext cx="5486400" cy="3991291"/>
           </a:xfrm>
           <a:prstGeom prst="rect">
             <a:avLst/>
@@ -3362,8 +3425,8 @@
         </p:nvSpPr>
         <p:spPr>
           <a:xfrm>
-            <a:off x="365760" y="182880"/>
-            <a:ext cx="11430000" cy="731520"/>
+            <a:off x="365760" y="137160"/>
+            <a:ext cx="11430000" cy="640080"/>
           </a:xfrm>
           <a:prstGeom prst="rect">
             <a:avLst/>
@@ -3377,10 +3440,10 @@
           <a:lstStyle/>
           <a:p>
             <a:pPr>
-              <a:defRPr sz="3200" b="1"/>
+              <a:defRPr sz="2800" b="1"/>
             </a:pPr>
             <a:r>
-              <a:t>Comparison and learnings</a:t>
+              <a:t>Results and learnings</a:t>
             </a:r>
           </a:p>
         </p:txBody>
@@ -3393,8 +3456,8 @@
         </p:nvSpPr>
         <p:spPr>
           <a:xfrm>
-            <a:off x="365760" y="1005840"/>
-            <a:ext cx="5303520" cy="5486400"/>
+            <a:off x="365760" y="868680"/>
+            <a:ext cx="5852160" cy="5577840"/>
           </a:xfrm>
           <a:prstGeom prst="rect">
             <a:avLst/>
@@ -3408,41 +3471,53 @@
           <a:lstStyle/>
           <a:p>
             <a:pPr>
-              <a:defRPr sz="1500"/>
+              <a:defRPr sz="1100"/>
             </a:pPr>
             <a:r>
-              <a:t>- mu~(t) tracks mu(t) closer than the survey mean or the offset baseline at every t</a:t>
+              <a:t>-  t   mu(t)  survey     mu~(t)+-SE  offset  oracle  n_eff/n</a:t>
+            </a:r>
+            <a:br/>
+            <a:r>
+              <a:t> 7   1.250   1.469   1.265+-0.022   1.181   1.275     0.94</a:t>
+            </a:r>
+            <a:br/>
+            <a:r>
+              <a:t> 8   1.500   1.693   1.484+-0.024   1.405   1.502     0.94</a:t>
+            </a:r>
+            <a:br/>
+            <a:r>
+              <a:t> 9   1.750   1.881   1.684+-0.026   1.593   1.709     0.95</a:t>
             </a:r>
           </a:p>
           <a:p>
             <a:pPr>
-              <a:defRPr sz="1500"/>
+              <a:defRPr sz="1100"/>
             </a:pPr>
             <a:r>
-              <a:t>- Learning 1: mu~ beats both baselines in- and out-of-sample (t=9: 1.752 vs true 1.75, survey mean 1.858, offset 1.601)</a:t>
+              <a:t>- Learning 1: alpha(t) is the unknown per-year normalising constant and it CANCELS in mu~=E_St[e^theta Y]/E_St[e^theta] -- lagged population data teaches theta's SHAPE only, never the current-year level, which is exactly what makes t&gt;m possible</a:t>
             </a:r>
           </a:p>
           <a:p>
             <a:pPr>
-              <a:defRPr sz="1500"/>
+              <a:defRPr sz="1100"/>
             </a:pPr>
             <a:r>
-              <a:t>- Learning 2: an unbounded theta net can blow up in sparse tails (theta~ hit about 380 at y=-6 pre-fix); a bounded head fixed both training stability and stress-test robustness</a:t>
+              <a:t>- Learning 2: the weight tail index decides whether ANY of the inference is valid. E_St[w^k]&lt;inf iff k&lt;a=1+1/(beta^2 sigma^2). Old beta=1.5: a=1.44, n_eff/n CV=0.790 across seeds, delta-SE 2.49x the true sampling sd, bias decay ~n^-0.36 (predicted n^-0.31) instead of n^-1, T7 a_hat=1.0255 (fails |a-1|&lt;0.02). beta=0.6: a=3.78, CV=0.048, SE ratio=0.99, T7 a_hat=1.0063 (passes). One defect, not four</a:t>
             </a:r>
           </a:p>
           <a:p>
             <a:pPr>
-              <a:defRPr sz="1500"/>
+              <a:defRPr sz="1100"/>
             </a:pPr>
             <a:r>
-              <a:t>- Learning 3: breaking Assumption 1 still biases mu~, but NOT in the direction the math's own qualitative prediction suggested -- reported as observed, not smoothed over</a:t>
+              <a:t>- Learning 3: what remains is approximation error, not sampling error. n_eff/n is 0.94-0.95, but theta~ drifts below theta* in the right tail, where 12.6% of S_9's mass sits (y&gt;3), and that drift alone accounts for the mu~(9) undershoot (implied shift -0.0289 vs actual -0.0289, 300 reps of n=200). theta* is strictly decreasing, convex, bounded below by log Phi(a_m)=-0.362; the current bounded head B=20 never binds (theta* in [-0.36, 4.23] over the training range) -- identified and quantified, not yet applied</a:t>
             </a:r>
           </a:p>
         </p:txBody>
       </p:sp>
       <p:pic>
         <p:nvPicPr>
-          <p:cNvPr id="4" name="Picture 3" descr="phase4_main_figure_8e4fef38.png"/>
+          <p:cNvPr id="4" name="Picture 3" descr="phase4_main_figure_96169d0c.png"/>
           <p:cNvPicPr>
             <a:picLocks noChangeAspect="1"/>
           </p:cNvPicPr>
@@ -3456,8 +3531,8 @@
         </p:blipFill>
         <p:spPr>
           <a:xfrm>
-            <a:off x="5852160" y="1005840"/>
-            <a:ext cx="5943600" cy="3979684"/>
+            <a:off x="6400800" y="868680"/>
+            <a:ext cx="5486400" cy="3742944"/>
           </a:xfrm>
           <a:prstGeom prst="rect">
             <a:avLst/>

--- a/slides/deck.pptx
+++ b/slides/deck.pptx
@@ -3147,7 +3147,7 @@
               <a:defRPr sz="1100"/>
             </a:pPr>
             <a:r>
-              <a:t>- P_t on (Y x {0,1}); pi_t(y) := P[R=1|Y=y] = c_t * Phi(beta*y); P_t,Y = N(m_t, sigma^2)</a:t>
+              <a:t>- Sample space: (Y x {0,1}, B(Y) (x) 2^{0,1}); pi_t(y) := P[R=1|Y=y] = c_t * Phi(beta*y); P_t,Y = N(m_t, sigma^2)</a:t>
             </a:r>
           </a:p>
           <a:p>
@@ -3187,7 +3187,7 @@
               <a:defRPr sz="1100"/>
             </a:pPr>
             <a:r>
-              <a:t>- theta*(y) = log Phi(a_m) - log Phi(beta*y); alpha*(t) = log Phi(a_t) - log Phi(a_m)</a:t>
+              <a:t>- Definition: a_t := beta*m_t / sqrt(1+beta^2 sigma^2); at t=m, a_m=0.5145 (live)</a:t>
             </a:r>
           </a:p>
           <a:p>
@@ -3195,7 +3195,23 @@
               <a:defRPr sz="1100"/>
             </a:pPr>
             <a:r>
-              <a:t>- Design rule (R3): beta*sigma &lt; 1/sqrt(2) (=0.7071); tail index a = 1+1/(beta^2 sigma^2) = 3.78 (R3 holds: True)</a:t>
+              <a:t>- theta*(y) = log Phi(a_m) - log Phi(beta*y); alpha*(t) = log Phi(a_t) - log Phi(a_m)</a:t>
+            </a:r>
+          </a:p>
+          <a:p>
+            <a:pPr>
+              <a:defRPr sz="1100"/>
+            </a:pPr>
+            <a:r>
+              <a:t>- Closed form: E_St[Y] = m_t + beta*sigma^2*phi(a_t) / (sqrt(1+beta^2 sigma^2)*Phi(a_t)); measured survey bias E_St[Y]-m_t = +0.4535 at t=1, +0.1677 at t=9</a:t>
+            </a:r>
+          </a:p>
+          <a:p>
+            <a:pPr>
+              <a:defRPr sz="1100"/>
+            </a:pPr>
+            <a:r>
+              <a:t>- Design rule (R3): beta*sigma &lt; 1/sqrt(2) (=0.7071); tail index kappa = 1+1/(beta^2 sigma^2) = 3.78 (R3 holds: True)</a:t>
             </a:r>
           </a:p>
         </p:txBody>
@@ -3354,7 +3370,7 @@
               <a:defRPr sz="1100"/>
             </a:pPr>
             <a:r>
-              <a:t>- Early stopping is REQUIRED, not cosmetic: R_hat_n is unbounded below for an interpolating theta. Measured: best val loss 0.4481 at epoch 140 of 400 run -- the best checkpoint is NOT the last epoch</a:t>
+              <a:t>- Early stopping is REQUIRED, not cosmetic: the piecewise-linear theta_k (+k at population rows, -k at survey rows) gives R_hat_n(k)=(1/2)(e^-k-k) -&gt; -inf as k-&gt;inf. Measured [k=0:+0.5000, k=1:-0.3161, k=2:-0.9323, k=4:-1.9908, k=8:-3.9998] vs the trained best val loss 0.4481 at epoch 140 of 400 run -- the best checkpoint is NOT the last epoch</a:t>
             </a:r>
           </a:p>
           <a:p>
@@ -3362,7 +3378,7 @@
               <a:defRPr sz="1100"/>
             </a:pPr>
             <a:r>
-              <a:t>- Verification: 14 passed in 39.73s. T4 torch-vs-numpy: loss diff 5.6e-17, worst grad diff 6.9e-17; T7 parametric recovery a_hat=1.0063; T11 weight tails a=3.78, n_eff CV=0.048, SE ratio=0.99</a:t>
+              <a:t>- Verification: 14 passed in 40.49s. T4 torch-vs-numpy: loss diff 5.6e-17, worst grad diff 6.9e-17; T7 parametric recovery a_hat=1.0063; T11 weight tails kappa=3.78, n_eff CV=0.048, SE ratio=0.99</a:t>
             </a:r>
           </a:p>
           <a:p>
@@ -3471,27 +3487,27 @@
           <a:lstStyle/>
           <a:p>
             <a:pPr>
-              <a:defRPr sz="1100"/>
+              <a:defRPr sz="900"/>
             </a:pPr>
             <a:r>
-              <a:t>-  t   mu(t)  survey     mu~(t)+-SE  offset  oracle  n_eff/n</a:t>
+              <a:t>-  t   mu(t)  survey     mu~(t)+-SE  offset  oracle  n_eff/n bias cut</a:t>
             </a:r>
             <a:br/>
             <a:r>
-              <a:t> 7   1.250   1.469   1.265+-0.022   1.181   1.275     0.94</a:t>
+              <a:t> 7   1.250   1.469   1.265+-0.022   1.181   1.275     0.94      93%</a:t>
             </a:r>
             <a:br/>
             <a:r>
-              <a:t> 8   1.500   1.693   1.484+-0.024   1.405   1.502     0.94</a:t>
+              <a:t> 8   1.500   1.693   1.484+-0.024   1.405   1.502     0.94      91%</a:t>
             </a:r>
             <a:br/>
             <a:r>
-              <a:t> 9   1.750   1.881   1.684+-0.026   1.593   1.709     0.95</a:t>
+              <a:t> 9   1.750   1.881   1.684+-0.026   1.593   1.709     0.95      49%</a:t>
             </a:r>
           </a:p>
           <a:p>
             <a:pPr>
-              <a:defRPr sz="1100"/>
+              <a:defRPr sz="900"/>
             </a:pPr>
             <a:r>
               <a:t>- Learning 1: alpha(t) is the unknown per-year normalising constant and it CANCELS in mu~=E_St[e^theta Y]/E_St[e^theta] -- lagged population data teaches theta's SHAPE only, never the current-year level, which is exactly what makes t&gt;m possible</a:t>
@@ -3499,18 +3515,42 @@
           </a:p>
           <a:p>
             <a:pPr>
-              <a:defRPr sz="1100"/>
+              <a:defRPr sz="900"/>
             </a:pPr>
             <a:r>
-              <a:t>- Learning 2: the weight tail index decides whether ANY of the inference is valid. E_St[w^k]&lt;inf iff k&lt;a=1+1/(beta^2 sigma^2). Old beta=1.5: a=1.44, n_eff/n CV=0.790 across seeds, delta-SE 2.49x the true sampling sd, bias decay ~n^-0.36 (predicted n^-0.31) instead of n^-1, T7 a_hat=1.0255 (fails |a-1|&lt;0.02). beta=0.6: a=3.78, CV=0.048, SE ratio=0.99, T7 a_hat=1.0063 (passes). One defect, not four</a:t>
+              <a:t>- Learning 2: the weight tail index decides whether ANY of the inference is valid. E_St[w^k]&lt;inf iff k&lt;kappa=1+1/(beta^2 sigma^2). Old beta=1.5: kappa=1.44, n_eff/n CV=0.790 across seeds, delta-SE 2.49x the true sampling sd, bias decay ~n^-0.36 (predicted n^-0.31) instead of n^-1, T7 a_hat=1.0255 (fails |a-1|&lt;0.02). beta=0.6: kappa=3.78, CV=0.048, SE ratio=0.99, T7 a_hat=1.0063 (passes). One defect, not four</a:t>
             </a:r>
           </a:p>
           <a:p>
             <a:pPr>
-              <a:defRPr sz="1100"/>
+              <a:defRPr sz="900"/>
             </a:pPr>
             <a:r>
-              <a:t>- Learning 3: what remains is approximation error, not sampling error. n_eff/n is 0.94-0.95, but theta~ drifts below theta* in the right tail, where 12.6% of S_9's mass sits (y&gt;3), and that drift alone accounts for the mu~(9) undershoot (implied shift -0.0289 vs actual -0.0289, 300 reps of n=200). theta* is strictly decreasing, convex, bounded below by log Phi(a_m)=-0.362; the current bounded head B=20 never binds (theta* in [-0.36, 4.23] over the training range) -- identified and quantified, not yet applied</a:t>
+              <a:t>- Learning 3 (headline): mu~ cuts the survey's bias vs mu(t) by t=7:93%, t=8:91%, t=9:49% -- decomposition mu~-mu=(oracle-mu)+(mu~-oracle): t=7: +0.0153=+0.0250+-0.0097 (+0.7 SE); t=8: -0.0165=+0.0019+-0.0184 (-0.7 SE); t=9: -0.0662=-0.0409+-0.0253 (-2.6 SE); only t=9 exceeds 2 SE -- sampling variability, not model error, explains most of the other gaps</a:t>
+            </a:r>
+          </a:p>
+          <a:p>
+            <a:pPr>
+              <a:defRPr sz="900"/>
+            </a:pPr>
+            <a:r>
+              <a:t>- Learning 3 (mechanism, not circular): hold theta~'s drift delta(y):=theta~(y)-theta*(y) FLAT beyond a cutoff c (delta(min(y,c))), paired on the same S_9 draws -- an ablation of the trained net's own output, not a re-interpolation of it. Full drift shift -0.0286 (sd 0.0018); flat beyond y=3 -&gt; -0.0178 (y&gt;3 contributes 38%); flat beyond y=2 -&gt; -0.0023 (y&gt;2 contributes 92%) -- at t=9, -0.0253 of the -0.0662 total gap (38%) is this model-drift term, the rest is sampling</a:t>
+            </a:r>
+          </a:p>
+          <a:p>
+            <a:pPr>
+              <a:defRPr sz="900"/>
+            </a:pPr>
+            <a:r>
+              <a:t>- Learning 3 (diagnosis): the far tail y&gt;3 is 12.7% of S_9's mass but contributes only 38% of the shift; the 2&lt;y&lt;=3 band (33.7% of mass) dominates -- that band is data-RICH at t=9 but data-POOR in training: survey mass share above y=2/3/4, pooled t&lt;=m vs S_9: 10.0% vs 46.4% (4.7x), 1.2% vs 12.7% (10.3x), 0.1% vs 1.5% (22.8x) -- TEMPORAL COVARIATE SHIFT, not extrapolation. mu~-oracle grows monotonically with t (-0.0097, -0.0184, -0.0253) -- a structural property of this data-fusion setting, not an implementation bug</a:t>
+            </a:r>
+          </a:p>
+          <a:p>
+            <a:pPr>
+              <a:defRPr sz="900"/>
+            </a:pPr>
+            <a:r>
+              <a:t>- theta* is strictly decreasing, convex, bounded below by log Phi(a_m)=-0.362; the bounded head B=20 never binds (theta* in [-0.36, 4.23] over the training range) -- identified, not yet applied. Sharper fix from the covariate-shift diagnosis: weight/augment training years toward the forecast years' y-region, or constrain theta~ to be monotone+convex (matching theta*'s known shape) instead of an unconstrained MLP</a:t>
             </a:r>
           </a:p>
         </p:txBody>

--- a/slides/deck.pptx
+++ b/slides/deck.pptx
@@ -3378,7 +3378,7 @@
               <a:defRPr sz="1100"/>
             </a:pPr>
             <a:r>
-              <a:t>- Verification: 14 passed in 40.49s. T4 torch-vs-numpy: loss diff 5.6e-17, worst grad diff 6.9e-17; T7 parametric recovery a_hat=1.0063; T11 weight tails kappa=3.78, n_eff CV=0.048, SE ratio=0.99</a:t>
+              <a:t>- Verification: 14 passed in 41.68s. T4 torch-vs-numpy: loss diff 5.6e-17, worst grad diff 6.9e-17; T7 parametric recovery a_hat=1.0063; T11 weight tails kappa=3.78, n_eff CV=0.048, SE ratio=0.99</a:t>
             </a:r>
           </a:p>
           <a:p>
@@ -3526,7 +3526,7 @@
               <a:defRPr sz="900"/>
             </a:pPr>
             <a:r>
-              <a:t>- Learning 3 (headline): mu~ cuts the survey's bias vs mu(t) by t=7:93%, t=8:91%, t=9:49% -- decomposition mu~-mu=(oracle-mu)+(mu~-oracle): t=7: +0.0153=+0.0250+-0.0097 (+0.7 SE); t=8: -0.0165=+0.0019+-0.0184 (-0.7 SE); t=9: -0.0662=-0.0409+-0.0253 (-2.6 SE); only t=9 exceeds 2 SE -- sampling variability, not model error, explains most of the other gaps</a:t>
+              <a:t>- Learning 3 (headline): mu~ cuts the survey's bias vs mu(t) by t=7:93%, t=8:91%, t=9:49% -- decomposition mu~-mu=(oracle-mu)+(mu~-oracle): t=7: +0.0153=+0.0250+-0.0097 (+0.7 SE); t=8: -0.0165=+0.0019+-0.0184 (-0.7 SE); t=9: -0.0662=-0.0409+-0.0253 (-2.6 SE); the model-drift term is present at every forecast year and grows monotonically (-0.0097, -0.0184, -0.0253); the sampling term is what swings in sign and size (+0.0250, +0.0019, -0.0409). Only at t=9 do the two align and push mu~-mu past 2 SE</a:t>
             </a:r>
           </a:p>
           <a:p>
@@ -3534,7 +3534,7 @@
               <a:defRPr sz="900"/>
             </a:pPr>
             <a:r>
-              <a:t>- Learning 3 (mechanism, not circular): hold theta~'s drift delta(y):=theta~(y)-theta*(y) FLAT beyond a cutoff c (delta(min(y,c))), paired on the same S_9 draws -- an ablation of the trained net's own output, not a re-interpolation of it. Full drift shift -0.0286 (sd 0.0018); flat beyond y=3 -&gt; -0.0178 (y&gt;3 contributes 38%); flat beyond y=2 -&gt; -0.0023 (y&gt;2 contributes 92%) -- at t=9, -0.0253 of the -0.0662 total gap (38%) is this model-drift term, the rest is sampling</a:t>
+              <a:t>- Learning 3 (mechanism, not circular): hold theta~'s drift delta(y):=theta~(y)-theta*(y) FLAT beyond a cutoff c (delta(min(y,c))), paired on the same S_9 draws -- an ablation of the trained net's own output, not a re-interpolation of it. Full drift shift -0.0286 (sd 0.0018); flat beyond y=3 -&gt; -0.0178 (y&gt;3 contributes 38%); flat beyond y=2 -&gt; -0.0023 (y&gt;2 contributes 92%) -- at t=9, -0.0253 of the -0.0662 total gap (38%) is this model-drift term, the rest is sampling (-0.0286 is the 200-rep ablation mean; -0.0253 is this sample's realisation, 1.8 sd apart)</a:t>
             </a:r>
           </a:p>
           <a:p>

--- a/slides/deck.pptx
+++ b/slides/deck.pptx
@@ -3143,74 +3143,56 @@
           </a:bodyPr>
           <a:lstStyle/>
           <a:p>
-            <a:pPr>
-              <a:defRPr sz="1100"/>
-            </a:pPr>
-            <a:r>
+            <a:r>
+              <a:rPr sz="1100" b="0"/>
               <a:t>- Sample space: (Y x {0,1}, B(Y) (x) 2^{0,1}); pi_t(y) := P[R=1|Y=y] = c_t * Phi(beta*y); P_t,Y = N(m_t, sigma^2)</a:t>
             </a:r>
           </a:p>
           <a:p>
-            <a:pPr>
-              <a:defRPr sz="1100"/>
-            </a:pPr>
-            <a:r>
+            <a:r>
+              <a:rPr sz="1100" b="0"/>
               <a:t>- S_t = Law(Y|R=1), density s_t = pi_t*p_t / rho_bar_t</a:t>
             </a:r>
           </a:p>
           <a:p>
-            <a:pPr>
-              <a:defRPr sz="1100"/>
-            </a:pPr>
-            <a:r>
+            <a:r>
+              <a:rPr sz="1100" b="0"/>
               <a:t>- m=6, M=9, n=2000, sigma=1.0, beta=0.6, m_t=-0.5+0.25t, c_t=0.9-0.06t</a:t>
             </a:r>
           </a:p>
           <a:p>
-            <a:pPr>
-              <a:defRPr sz="1100"/>
-            </a:pPr>
-            <a:r>
+            <a:r>
+              <a:rPr sz="1100" b="0"/>
               <a:t>- Assumption 1 holds exactly: Phi(beta*y)/Phi(beta*y') has no t. rho_bar_t = c_t*Phi(a_t) varies with t but cancels out of S_t</a:t>
             </a:r>
           </a:p>
           <a:p>
-            <a:pPr>
-              <a:defRPr sz="1100"/>
-            </a:pPr>
-            <a:r>
+            <a:r>
+              <a:rPr sz="1100" b="0"/>
               <a:t>- Sampler: Y~N(m_t,sigma^2), R~Bern(c_t*Phi(beta*Y)), keep Y with R=1 -- rejection sampling IS conditioning on R=1</a:t>
             </a:r>
           </a:p>
           <a:p>
-            <a:pPr>
-              <a:defRPr sz="1100"/>
-            </a:pPr>
-            <a:r>
+            <a:r>
+              <a:rPr sz="1100" b="0"/>
               <a:t>- Definition: a_t := beta*m_t / sqrt(1+beta^2 sigma^2); at t=m, a_m=0.5145 (live)</a:t>
             </a:r>
           </a:p>
           <a:p>
-            <a:pPr>
-              <a:defRPr sz="1100"/>
-            </a:pPr>
-            <a:r>
+            <a:r>
+              <a:rPr sz="1100" b="0"/>
               <a:t>- theta*(y) = log Phi(a_m) - log Phi(beta*y); alpha*(t) = log Phi(a_t) - log Phi(a_m)</a:t>
             </a:r>
           </a:p>
           <a:p>
-            <a:pPr>
-              <a:defRPr sz="1100"/>
-            </a:pPr>
-            <a:r>
+            <a:r>
+              <a:rPr sz="1100" b="0"/>
               <a:t>- Closed form: E_St[Y] = m_t + beta*sigma^2*phi(a_t) / (sqrt(1+beta^2 sigma^2)*Phi(a_t)); measured survey bias E_St[Y]-m_t = +0.4535 at t=1, +0.1677 at t=9</a:t>
             </a:r>
           </a:p>
           <a:p>
-            <a:pPr>
-              <a:defRPr sz="1100"/>
-            </a:pPr>
-            <a:r>
+            <a:r>
+              <a:rPr sz="1100" b="0"/>
               <a:t>- Design rule (R3): beta*sigma &lt; 1/sqrt(2) (=0.7071); tail index kappa = 1+1/(beta^2 sigma^2) = 3.78 (R3 holds: True)</a:t>
             </a:r>
           </a:p>
@@ -3342,51 +3324,141 @@
           </a:bodyPr>
           <a:lstStyle/>
           <a:p>
-            <a:pPr>
-              <a:defRPr sz="1100"/>
-            </a:pPr>
-            <a:r>
-              <a:t>- Pooled F over rows (t,z,y), 2mn=24000 rows; L=mean((1-z)*exp(r)-z*r), r=theta(y)+alpha[t]</a:t>
-            </a:r>
-          </a:p>
-          <a:p>
-            <a:pPr>
-              <a:defRPr sz="1100"/>
-            </a:pPr>
-            <a:r>
-              <a:t>- Why this loss: its minimizer over separable r is log dP_t,Y/dS_t (the NWJ variational form of KL); alpha(t)=-log E_St[e^theta] is a per-year log-partition constant; the anchor alpha(m)=0 removes the flat direction (theta+c, alpha-c)</a:t>
-            </a:r>
-          </a:p>
-          <a:p>
-            <a:pPr>
-              <a:defRPr sz="1100"/>
-            </a:pPr>
-            <a:r>
-              <a:t>- Implementation: theta=MLP(1-&gt;H-&gt;1,ReLU,H=32); alpha=free vector in R^(m-1) concat with a constant 0; float64; Adam lr=0.001, wd=1e-05 (network only), batch=256; stratified 80/20 split; early stopping on validation risk</a:t>
-            </a:r>
-          </a:p>
-          <a:p>
-            <a:pPr>
-              <a:defRPr sz="1100"/>
-            </a:pPr>
-            <a:r>
-              <a:t>- Early stopping is REQUIRED, not cosmetic: the piecewise-linear theta_k (+k at population rows, -k at survey rows) gives R_hat_n(k)=(1/2)(e^-k-k) -&gt; -inf as k-&gt;inf. Measured [k=0:+0.5000, k=1:-0.3161, k=2:-0.9323, k=4:-1.9908, k=8:-3.9998] vs the trained best val loss 0.4481 at epoch 140 of 400 run -- the best checkpoint is NOT the last epoch</a:t>
-            </a:r>
-          </a:p>
-          <a:p>
-            <a:pPr>
-              <a:defRPr sz="1100"/>
-            </a:pPr>
-            <a:r>
-              <a:t>- Verification: 14 passed in 41.68s. T4 torch-vs-numpy: loss diff 5.6e-17, worst grad diff 6.9e-17; T7 parametric recovery a_hat=1.0063; T11 weight tails kappa=3.78, n_eff CV=0.048, SE ratio=0.99</a:t>
-            </a:r>
-          </a:p>
-          <a:p>
-            <a:pPr>
-              <a:defRPr sz="1100"/>
-            </a:pPr>
-            <a:r>
-              <a:t>- Diagnostics before any mu~ is reported: FOC mean_i e^(theta~+alpha~(t)) per year [t=1:1.037, t=2:1.012, t=3:1.003, t=4:0.998, t=5:0.988, t=6:0.969]; theta~ vs theta* grid; n_eff</a:t>
+            <a:r>
+              <a:rPr sz="1100" b="1"/>
+              <a:t>Objective</a:t>
+            </a:r>
+          </a:p>
+          <a:p>
+            <a:r>
+              <a:rPr sz="1000" b="0"/>
+              <a:t>- F: T~Unif[m], Z~Bern(½), Y|T=t,Z=1 ~ P_t,Y, Y|T=t,Z=0 ~ S_t. Rows (t,z,y): 2mn = 24 000</a:t>
+            </a:r>
+          </a:p>
+          <a:p>
+            <a:r>
+              <a:rPr sz="1000" b="0"/>
+              <a:t>- L = mean[(1−z)·e^r − z·r], r = θ(y)+α[t], α ∈ 𝒜 = {α ∈ ℝ^m : α(m)=0}</a:t>
+            </a:r>
+          </a:p>
+          <a:p>
+            <a:r>
+              <a:rPr sz="1000" b="0"/>
+              <a:t>- E_F[L] = (1/2m)·Σ_t J_t(θ+α(t)), J_t(r) = E_St[e^r] − E_Pt,Y[r] = E_St[e^r − ρ_t·r]</a:t>
+            </a:r>
+          </a:p>
+          <a:p>
+            <a:r>
+              <a:rPr sz="1000" b="0"/>
+              <a:t>- φ(u) = e^u − ρu, φ″ = e^u &gt; 0 ⇒ unique min at r = log ρ_t = θ*(y)+α*(t)</a:t>
+            </a:r>
+          </a:p>
+          <a:p>
+            <a:r>
+              <a:rPr sz="1000" b="0"/>
+              <a:t>- min J_t = 1 − KL(P_t,Y‖S_t) (NWJ); excess = E_Pt,Y[e^δ −1− δ] ≥ 0, δ = r − log ρ_t</a:t>
+            </a:r>
+          </a:p>
+          <a:p>
+            <a:r>
+              <a:rPr sz="1000" b="0"/>
+              <a:t>- ∂/∂α(t) = 0 ⇒ E_St[e^{θ+α(t)}] = 1 ⇒ α(t) = −log Z_t, Z_t = E_St[e^θ] (log-partition)</a:t>
+            </a:r>
+          </a:p>
+          <a:p>
+            <a:r>
+              <a:rPr sz="1000" b="0"/>
+              <a:t>- (θ+c, α−c) leaves r fixed ⇒ α(m)=0 pins the flat direction</a:t>
+            </a:r>
+          </a:p>
+          <a:p>
+            <a:r>
+              <a:rPr sz="1100" b="1"/>
+              <a:t>Model and training</a:t>
+            </a:r>
+          </a:p>
+          <a:p>
+            <a:r>
+              <a:rPr sz="1000" b="0"/>
+              <a:t>- θ: MLP 1→32→1, ReLU, 3H+1 = 97 params; α: free ℝ^5 ⊕ {0}; float64</a:t>
+            </a:r>
+          </a:p>
+          <a:p>
+            <a:r>
+              <a:rPr sz="1000" b="0"/>
+              <a:t>- Adam lr 1e-3, wd 1e-5 (net only), batch 256, stratified 80/20 per (t,z), early stop on val risk</a:t>
+            </a:r>
+          </a:p>
+          <a:p>
+            <a:r>
+              <a:rPr sz="1000" b="0"/>
+              <a:t>- Regularisation mandatory: θ_k = +k on z=1, −k on z=0 (continuous PL, representable) ⇒ R̂_n = ½(e^{−k}−k) → −∞. Measured k=0,1,2,4,8: </a:t>
+            </a:r>
+            <a:r>
+              <a:rPr sz="1000" b="1"/>
+              <a:t>0.5000, -0.3161, -0.9323, -1.9908, -3.9998</a:t>
+            </a:r>
+          </a:p>
+          <a:p>
+            <a:r>
+              <a:rPr sz="1000" b="0"/>
+              <a:t>- Best val </a:t>
+            </a:r>
+            <a:r>
+              <a:rPr sz="1000" b="1"/>
+              <a:t>0.4481 @ epoch 140/400</a:t>
+            </a:r>
+            <a:r>
+              <a:rPr sz="1000" b="0"/>
+              <a:t> (θ≡0 ⇒ 0.5)</a:t>
+            </a:r>
+          </a:p>
+          <a:p>
+            <a:r>
+              <a:rPr sz="1100" b="1"/>
+              <a:t>Tests 14/14, 66.10 s</a:t>
+            </a:r>
+          </a:p>
+          <a:p>
+            <a:r>
+              <a:rPr sz="1000" b="0"/>
+              <a:t>- DGP — T1 closed forms vs MC; T2 kept-sample law vs quadrature; T3 w(y,y') constant in t</a:t>
+            </a:r>
+          </a:p>
+          <a:p>
+            <a:r>
+              <a:rPr sz="1000" b="0"/>
+              <a:t>- Loss/gradients — T4 torch vs hand-derived numpy backward: loss 5.6e-17, grad 6.9e-17; T5 autograd gradcheck (float64); T6 joint convexity in (theta,a); T7 parametric recovery a_hat = 1.0063; T8 alpha[m] = 0</a:t>
+            </a:r>
+          </a:p>
+          <a:p>
+            <a:r>
+              <a:rPr sz="1000" b="0"/>
+              <a:t>- Estimator — T9 oracle mu~ vs mu within 3 SE; T10 trained mu~ vs oracle</a:t>
+            </a:r>
+          </a:p>
+          <a:p>
+            <a:r>
+              <a:rPr sz="1000" b="0"/>
+              <a:t>- Weights — T11a kappa = 3.78 &gt; 3; T11b n_eff CV = 0.048 &lt; 0.20; T11c SE/sd = 0.99 in [0.75,1.33]; T11d n*bias -&gt; 1.084</a:t>
+            </a:r>
+          </a:p>
+          <a:p>
+            <a:r>
+              <a:rPr sz="1100" b="1"/>
+              <a:t>Diagnostics before any μ̃</a:t>
+            </a:r>
+          </a:p>
+          <a:p>
+            <a:r>
+              <a:rPr sz="1000" b="0"/>
+              <a:t>- FOC mean_i e^{θ̃+α̃(t)} = 1.037, 1.012, 1.003, 0.998, 0.988, 0.969 (necessary, not sufficient)</a:t>
+            </a:r>
+          </a:p>
+          <a:p>
+            <a:r>
+              <a:rPr sz="1000" b="0"/>
+              <a:t>- θ̃−θ* grid, mean-centred; n_eff = (Σw)²/Σw²</a:t>
             </a:r>
           </a:p>
         </p:txBody>
@@ -3486,71 +3558,122 @@
           </a:bodyPr>
           <a:lstStyle/>
           <a:p>
-            <a:pPr>
-              <a:defRPr sz="900"/>
-            </a:pPr>
-            <a:r>
-              <a:t>-  t   mu(t)  survey     mu~(t)+-SE  offset  oracle  n_eff/n bias cut</a:t>
-            </a:r>
-            <a:br/>
-            <a:r>
-              <a:t> 7   1.250   1.469   1.265+-0.022   1.181   1.275     0.94      93%</a:t>
-            </a:r>
-            <a:br/>
-            <a:r>
-              <a:t> 8   1.500   1.693   1.484+-0.024   1.405   1.502     0.94      91%</a:t>
-            </a:r>
-            <a:br/>
-            <a:r>
-              <a:t> 9   1.750   1.881   1.684+-0.026   1.593   1.709     0.95      49%</a:t>
-            </a:r>
-          </a:p>
-          <a:p>
-            <a:pPr>
-              <a:defRPr sz="900"/>
-            </a:pPr>
-            <a:r>
-              <a:t>- Learning 1: alpha(t) is the unknown per-year normalising constant and it CANCELS in mu~=E_St[e^theta Y]/E_St[e^theta] -- lagged population data teaches theta's SHAPE only, never the current-year level, which is exactly what makes t&gt;m possible</a:t>
-            </a:r>
-          </a:p>
-          <a:p>
-            <a:pPr>
-              <a:defRPr sz="900"/>
-            </a:pPr>
-            <a:r>
-              <a:t>- Learning 2: the weight tail index decides whether ANY of the inference is valid. E_St[w^k]&lt;inf iff k&lt;kappa=1+1/(beta^2 sigma^2). Old beta=1.5: kappa=1.44, n_eff/n CV=0.790 across seeds, delta-SE 2.49x the true sampling sd, bias decay ~n^-0.36 (predicted n^-0.31) instead of n^-1, T7 a_hat=1.0255 (fails |a-1|&lt;0.02). beta=0.6: kappa=3.78, CV=0.048, SE ratio=0.99, T7 a_hat=1.0063 (passes). One defect, not four</a:t>
-            </a:r>
-          </a:p>
-          <a:p>
-            <a:pPr>
-              <a:defRPr sz="900"/>
-            </a:pPr>
-            <a:r>
-              <a:t>- Learning 3 (headline): mu~ cuts the survey's bias vs mu(t) by t=7:93%, t=8:91%, t=9:49% -- decomposition mu~-mu=(oracle-mu)+(mu~-oracle): t=7: +0.0153=+0.0250+-0.0097 (+0.7 SE); t=8: -0.0165=+0.0019+-0.0184 (-0.7 SE); t=9: -0.0662=-0.0409+-0.0253 (-2.6 SE); the model-drift term is present at every forecast year and grows monotonically (-0.0097, -0.0184, -0.0253); the sampling term is what swings in sign and size (+0.0250, +0.0019, -0.0409). Only at t=9 do the two align and push mu~-mu past 2 SE</a:t>
-            </a:r>
-          </a:p>
-          <a:p>
-            <a:pPr>
-              <a:defRPr sz="900"/>
-            </a:pPr>
-            <a:r>
-              <a:t>- Learning 3 (mechanism, not circular): hold theta~'s drift delta(y):=theta~(y)-theta*(y) FLAT beyond a cutoff c (delta(min(y,c))), paired on the same S_9 draws -- an ablation of the trained net's own output, not a re-interpolation of it. Full drift shift -0.0286 (sd 0.0018); flat beyond y=3 -&gt; -0.0178 (y&gt;3 contributes 38%); flat beyond y=2 -&gt; -0.0023 (y&gt;2 contributes 92%) -- at t=9, -0.0253 of the -0.0662 total gap (38%) is this model-drift term, the rest is sampling (-0.0286 is the 200-rep ablation mean; -0.0253 is this sample's realisation, 1.8 sd apart)</a:t>
-            </a:r>
-          </a:p>
-          <a:p>
-            <a:pPr>
-              <a:defRPr sz="900"/>
-            </a:pPr>
-            <a:r>
-              <a:t>- Learning 3 (diagnosis): the far tail y&gt;3 is 12.7% of S_9's mass but contributes only 38% of the shift; the 2&lt;y&lt;=3 band (33.7% of mass) dominates -- that band is data-RICH at t=9 but data-POOR in training: survey mass share above y=2/3/4, pooled t&lt;=m vs S_9: 10.0% vs 46.4% (4.7x), 1.2% vs 12.7% (10.3x), 0.1% vs 1.5% (22.8x) -- TEMPORAL COVARIATE SHIFT, not extrapolation. mu~-oracle grows monotonically with t (-0.0097, -0.0184, -0.0253) -- a structural property of this data-fusion setting, not an implementation bug</a:t>
-            </a:r>
-          </a:p>
-          <a:p>
-            <a:pPr>
-              <a:defRPr sz="900"/>
-            </a:pPr>
-            <a:r>
-              <a:t>- theta* is strictly decreasing, convex, bounded below by log Phi(a_m)=-0.362; the bounded head B=20 never binds (theta* in [-0.36, 4.23] over the training range) -- identified, not yet applied. Sharper fix from the covariate-shift diagnosis: weight/augment training years toward the forecast years' y-region, or constrain theta~ to be monotone+convex (matching theta*'s known shape) instead of an unconstrained MLP</a:t>
+            <a:r>
+              <a:rPr sz="1000" b="0"/>
+              <a:t>- μ̃(t) = Σᵢwᵢyᵢ / Σᵢwᵢ, w = e^{θ̃(y)}, yᵢ ~ S_t, t &gt; m</a:t>
+            </a:r>
+          </a:p>
+          <a:p>
+            <a:r>
+              <a:rPr sz="1000" b="0"/>
+              <a:t>-  t    μ(t)  survey       μ̃(t)±SE  offset  oracle  n_eff/n bias cut
+ 7   1.250   1.469   1.265±0.022   1.181   1.275     0.94      93%
+ 8   1.500   1.693   1.484±0.024   1.405   1.502     0.94      91%
+ 9   1.750   1.881   1.684±0.026   1.593   1.709     0.95      49%</a:t>
+            </a:r>
+          </a:p>
+          <a:p>
+            <a:r>
+              <a:rPr sz="1000" b="0"/>
+              <a:t>- </a:t>
+            </a:r>
+            <a:r>
+              <a:rPr sz="1000" b="1"/>
+              <a:t>L1 — α cancels.</a:t>
+            </a:r>
+            <a:r>
+              <a:rPr sz="1000" b="0"/>
+              <a:t> μ(t) = e^{α*(t)}E_St[e^{θ*}Y] and 1 = e^{α*(t)}E_St[e^{θ*}] ⇒ μ(t) = E_St[e^{θ*}Y]/E_St[e^{θ*}]. Paired years give θ's *shape*; the current survey's own Z_t gives the level. t &gt; m needs no P_t.</a:t>
+            </a:r>
+          </a:p>
+          <a:p>
+            <a:r>
+              <a:rPr sz="1000" b="0"/>
+              <a:t>- </a:t>
+            </a:r>
+            <a:r>
+              <a:rPr sz="1000" b="1"/>
+              <a:t>L2 — κ decides validity.</a:t>
+            </a:r>
+            <a:r>
+              <a:rPr sz="1000" b="0"/>
+              <a:t> w = Φ(a_m)/Φ(βy); 1/Φ(βy) ~ e^{β²y²/2} (Mills) ⇒ E_St[w^k] &lt; ∞ ⇔ k &lt; κ = 1+1/(β²σ²). k=2 ⇔ βσ&lt;1 (CLT/SE); k=3 ⇔ βσ&lt;1/√2 (O(1/n) bias) ⇒ (R3).</a:t>
+            </a:r>
+          </a:p>
+          <a:p>
+            <a:r>
+              <a:rPr sz="1000" b="0"/>
+              <a:t>-                                 β=1.5, κ=1.44          β=0.6, κ=3.78
+  n_eff/n CV, 10 seeds                  0.790                  0.048
+         delta-SE ÷ sd                   2.49                   0.99
+            bias decay n^-0.36 (pred n^-0.31)         n·bias → 1.084
+                  T7 â               1.0255 ✗               1.0063 ✓</a:t>
+            </a:r>
+          </a:p>
+          <a:p>
+            <a:r>
+              <a:rPr sz="1000" b="0"/>
+              <a:t>- One cause, four symptoms.</a:t>
+            </a:r>
+          </a:p>
+          <a:p>
+            <a:r>
+              <a:rPr sz="1000" b="0"/>
+              <a:t>- </a:t>
+            </a:r>
+            <a:r>
+              <a:rPr sz="1000" b="1"/>
+              <a:t>L3 — residual is approximation, not sampling.</a:t>
+            </a:r>
+            <a:r>
+              <a:rPr sz="1000" b="0"/>
+              <a:t> μ̃−μ = (oracle−μ) + (μ̃−oracle):</a:t>
+            </a:r>
+          </a:p>
+          <a:p>
+            <a:r>
+              <a:rPr sz="1000" b="0"/>
+              <a:t>-  t      μ̃−μ  sampling     model     SE
+ 7   +0.0153   +0.0250   -0.0097  +0.7
+ 8   -0.0165   +0.0019   -0.0184  -0.7
+ 9   -0.0662   -0.0409   -0.0253  -2.6
+Model term monotone; sampling term swings sign.</a:t>
+            </a:r>
+          </a:p>
+          <a:p>
+            <a:r>
+              <a:rPr sz="1000" b="0"/>
+              <a:t>- Ablation δ(y) = θ̃−θ*, held flat past c, paired on S_9 draws:
+     c  mean shift    contributes
+  full     -0.0286              —
+     3     -0.0178       y&gt;3: 38%
+     2     -0.0023       y&gt;2: 92%
+⇒ band 2&lt;y≤3 = 54%</a:t>
+            </a:r>
+          </a:p>
+          <a:p>
+            <a:r>
+              <a:rPr sz="1000" b="0"/>
+              <a:t>- Survey mass share, pooled t≤m vs S_9:
+  y&gt;  pooled t≤m      S_9   ratio
+   2      10.0%    46.4%    4.7x
+   3       1.2%    12.7%   10.3x
+   4       0.1%     1.5%   22.8x
+</a:t>
+            </a:r>
+            <a:r>
+              <a:rPr sz="1000" b="1"/>
+              <a:t>Temporal covariate shift</a:t>
+            </a:r>
+            <a:r>
+              <a:rPr sz="1000" b="0"/>
+              <a:t>, not extrapolation; excess risk is weighted by the *training* measure.</a:t>
+            </a:r>
+          </a:p>
+          <a:p>
+            <a:r>
+              <a:rPr sz="1000" b="0"/>
+              <a:t>- θ* strictly decreasing, convex, ≥ log Φ(a_m) = -0.362; B=20 never binds (θ* ∈ [-0.36, 4.23]). Fix: reweight training years toward the forecast y-region; constrain θ̃ monotone + convex.</a:t>
             </a:r>
           </a:p>
         </p:txBody>
